--- a/samples/2026-10/Standardizing_GenAI_Observability 2610.pptx
+++ b/samples/2026-10/Standardizing_GenAI_Observability 2610.pptx
@@ -5,7 +5,7 @@
     <p:sldMasterId id="2147483648" r:id="rId1"/>
   </p:sldMasterIdLst>
   <p:notesMasterIdLst>
-    <p:notesMasterId r:id="rId15"/>
+    <p:notesMasterId r:id="rId14"/>
   </p:notesMasterIdLst>
   <p:sldIdLst>
     <p:sldId id="256" r:id="rId2"/>
@@ -20,7 +20,6 @@
     <p:sldId id="265" r:id="rId11"/>
     <p:sldId id="266" r:id="rId12"/>
     <p:sldId id="267" r:id="rId13"/>
-    <p:sldId id="268" r:id="rId14"/>
   </p:sldIdLst>
   <p:sldSz cx="16256000" cy="9144000"/>
   <p:notesSz cx="7559675" cy="10691813"/>
@@ -445,7 +444,7 @@
             <a:pPr indent="0" algn="r">
               <a:buNone/>
             </a:pPr>
-            <a:fld id="{4B24A35B-39E5-4CF7-97A8-7C1CF04ED6D0}" type="slidenum">
+            <a:fld id="{03BF6639-CE35-421B-B729-02326B35E96D}" type="slidenum">
               <a:rPr lang="en-US" sz="1400" b="0" u="none" strike="noStrike">
                 <a:solidFill>
                   <a:srgbClr val="000000"/>
@@ -584,7 +583,7 @@
       </p:grpSpPr>
       <p:sp>
         <p:nvSpPr>
-          <p:cNvPr id="80" name="PlaceHolder 1"/>
+          <p:cNvPr id="79" name="PlaceHolder 1"/>
           <p:cNvSpPr>
             <a:spLocks noGrp="1" noRot="1" noChangeAspect="1"/>
           </p:cNvSpPr>
@@ -607,7 +606,7 @@
       </p:sp>
       <p:sp>
         <p:nvSpPr>
-          <p:cNvPr id="81" name="PlaceHolder 2"/>
+          <p:cNvPr id="80" name="PlaceHolder 2"/>
           <p:cNvSpPr>
             <a:spLocks noGrp="1"/>
           </p:cNvSpPr>
@@ -646,7 +645,29 @@
                 <a:uFillTx/>
                 <a:latin typeface="Arial"/>
               </a:rPr>
-              <a:t>Core Topic: Introduction to the AI Runtime Frontier and Distributed Systems Reality</a:t>
+              <a:t>Core Topic: Introduction to Open Inference and </a:t>
+            </a:r>
+            <a:r>
+              <a:rPr lang="en-US" sz="2000" b="0" u="none" strike="noStrike" dirty="0" err="1">
+                <a:solidFill>
+                  <a:srgbClr val="000000"/>
+                </a:solidFill>
+                <a:effectLst/>
+                <a:uFillTx/>
+                <a:latin typeface="Arial"/>
+              </a:rPr>
+              <a:t>OpenTelemetry</a:t>
+            </a:r>
+            <a:r>
+              <a:rPr lang="en-US" sz="2000" b="0" u="none" strike="noStrike" dirty="0">
+                <a:solidFill>
+                  <a:srgbClr val="000000"/>
+                </a:solidFill>
+                <a:effectLst/>
+                <a:uFillTx/>
+                <a:latin typeface="Arial"/>
+              </a:rPr>
+              <a:t> Standardization</a:t>
             </a:r>
           </a:p>
           <a:p>
@@ -675,7 +696,7 @@
                 <a:uFillTx/>
                 <a:latin typeface="Arial"/>
               </a:rPr>
-              <a:t>Good morning, everyone, and welcome. Today, we are tackling one of the most pressing architectural questions in modern software engineering: </a:t>
+              <a:t>Good morning, everyone, and welcome. Today, we are exploring a monumental shift in cloud-native engineering and observability: </a:t>
             </a:r>
             <a:r>
               <a:rPr lang="en-US" sz="2000" b="1" u="none" strike="noStrike" dirty="0">
@@ -686,7 +707,7 @@
                 <a:uFillTx/>
                 <a:latin typeface="Arial"/>
               </a:rPr>
-              <a:t>Why AI Can Write Code But Can’t Keep It Running</a:t>
+              <a:t>The Symbiosis of Speed and Standards</a:t>
             </a:r>
             <a:r>
               <a:rPr lang="en-US" sz="2000" b="0" u="none" strike="noStrike" dirty="0">
@@ -713,13 +734,19 @@
                 <a:uFillTx/>
                 <a:latin typeface="Arial"/>
               </a:rPr>
-              <a:t>If you look at the title subtitle on this slide, it establishes the core boundary: The fundamental boundary between digital syntax and the heavy-tailed reality of distributed systems. Over the last few years, we have watched artificial intelligence achieve miraculous breakthroughs in code generation. Give an LLM a prompt, and it will spit out pristine Python, TypeScript, or SQL in seconds. </a:t>
-            </a:r>
-          </a:p>
-          <a:p>
-            <a:pPr indent="0" algn="l">
-              <a:buNone/>
-            </a:pPr>
+              <a:t>If you look at the title subtitle on this slide, it highlights a critical intersection: How the Open Inference donation to </a:t>
+            </a:r>
+            <a:r>
+              <a:rPr lang="en-US" sz="2000" b="0" u="none" strike="noStrike" dirty="0" err="1">
+                <a:solidFill>
+                  <a:srgbClr val="000000"/>
+                </a:solidFill>
+                <a:effectLst/>
+                <a:uFillTx/>
+                <a:latin typeface="Arial"/>
+              </a:rPr>
+              <a:t>OpenTelemetry</a:t>
+            </a:r>
             <a:r>
               <a:rPr lang="en-US" sz="2000" b="0" u="none" strike="noStrike" dirty="0">
                 <a:solidFill>
@@ -729,7 +756,7 @@
                 <a:uFillTx/>
                 <a:latin typeface="Arial"/>
               </a:rPr>
-              <a:t>But writing code in a sandbox is a completely different universe from keeping complex distributed systems running under live, chaotic production loads. In this slide deck—synthesized from deep technical discussions with systems engineering leaders like </a:t>
+              <a:t> is standardizing </a:t>
             </a:r>
             <a:r>
               <a:rPr lang="en-US" sz="2000" b="0" u="none" strike="noStrike" dirty="0" err="1">
@@ -740,7 +767,7 @@
                 <a:uFillTx/>
                 <a:latin typeface="Arial"/>
               </a:rPr>
-              <a:t>Jad</a:t>
+              <a:t>GenAI</a:t>
             </a:r>
             <a:r>
               <a:rPr lang="en-US" sz="2000" b="0" u="none" strike="noStrike" dirty="0">
@@ -751,7 +778,23 @@
                 <a:uFillTx/>
                 <a:latin typeface="Arial"/>
               </a:rPr>
-              <a:t> </a:t>
+              <a:t> observability. For years, infrastructure and application monitoring relied on predictable HTTP requests and simple database queries. But as generative AI and autonomous agents exploded across the enterprise, our monitoring systems hit a brick wall. </a:t>
+            </a:r>
+          </a:p>
+          <a:p>
+            <a:pPr indent="0" algn="l">
+              <a:buNone/>
+            </a:pPr>
+            <a:r>
+              <a:rPr lang="en-US" sz="2000" b="0" u="none" strike="noStrike" dirty="0">
+                <a:solidFill>
+                  <a:srgbClr val="000000"/>
+                </a:solidFill>
+                <a:effectLst/>
+                <a:uFillTx/>
+                <a:latin typeface="Arial"/>
+              </a:rPr>
+              <a:t>In this session, we will break down how the wild-west speed of startup innovation—specifically </a:t>
             </a:r>
             <a:r>
               <a:rPr lang="en-US" sz="2000" b="0" u="none" strike="noStrike" dirty="0" err="1">
@@ -762,7 +805,7 @@
                 <a:uFillTx/>
                 <a:latin typeface="Arial"/>
               </a:rPr>
-              <a:t>Jebrane</a:t>
+              <a:t>Arize’s</a:t>
             </a:r>
             <a:r>
               <a:rPr lang="en-US" sz="2000" b="0" u="none" strike="noStrike" dirty="0">
@@ -773,7 +816,29 @@
                 <a:uFillTx/>
                 <a:latin typeface="Arial"/>
               </a:rPr>
-              <a:t>—we will examine why syntax is solved, why operations remain uncharted, and how engineering teams must adapt to the runtime frontier. Let's jump in. </a:t>
+              <a:t> open-source Open Inference framework—collided with and successfully merged into the deliberate, consensus-driven standards of the </a:t>
+            </a:r>
+            <a:r>
+              <a:rPr lang="en-US" sz="2000" b="0" u="none" strike="noStrike" dirty="0" err="1">
+                <a:solidFill>
+                  <a:srgbClr val="000000"/>
+                </a:solidFill>
+                <a:effectLst/>
+                <a:uFillTx/>
+                <a:latin typeface="Arial"/>
+              </a:rPr>
+              <a:t>OpenTelemetry</a:t>
+            </a:r>
+            <a:r>
+              <a:rPr lang="en-US" sz="2000" b="0" u="none" strike="noStrike" dirty="0">
+                <a:solidFill>
+                  <a:srgbClr val="000000"/>
+                </a:solidFill>
+                <a:effectLst/>
+                <a:uFillTx/>
+                <a:latin typeface="Arial"/>
+              </a:rPr>
+              <a:t> community. Let's dive into how we got here and where observability is heading. </a:t>
             </a:r>
           </a:p>
           <a:p>
@@ -819,6 +884,32 @@
             <a:pPr indent="0" algn="l">
               <a:buNone/>
             </a:pPr>
+            <a:endParaRPr lang="en-US" sz="2000" b="0" u="none" strike="noStrike" dirty="0">
+              <a:solidFill>
+                <a:srgbClr val="000000"/>
+              </a:solidFill>
+              <a:effectLst/>
+              <a:uFillTx/>
+              <a:latin typeface="Arial"/>
+            </a:endParaRPr>
+          </a:p>
+          <a:p>
+            <a:pPr indent="0" algn="l">
+              <a:buNone/>
+            </a:pPr>
+            <a:endParaRPr lang="en-US" sz="2000" b="0" u="none" strike="noStrike" dirty="0">
+              <a:solidFill>
+                <a:srgbClr val="000000"/>
+              </a:solidFill>
+              <a:effectLst/>
+              <a:uFillTx/>
+              <a:latin typeface="Arial"/>
+            </a:endParaRPr>
+          </a:p>
+          <a:p>
+            <a:pPr indent="0" algn="l">
+              <a:buNone/>
+            </a:pPr>
             <a:r>
               <a:rPr lang="en-US" altLang="zh-HK" sz="2000" b="0" u="none" strike="noStrike" dirty="0">
                 <a:solidFill>
@@ -828,13 +919,19 @@
                 <a:uFillTx/>
                 <a:latin typeface="Arial"/>
               </a:rPr>
-              <a:t>Why AI Can Write Code But Can’t Keep It Running (Yet)</a:t>
-            </a:r>
-          </a:p>
-          <a:p>
-            <a:pPr indent="0" algn="l">
-              <a:buNone/>
-            </a:pPr>
+              <a:t>Observation Deck | To </a:t>
+            </a:r>
+            <a:r>
+              <a:rPr lang="en-US" altLang="zh-HK" sz="2000" b="0" u="none" strike="noStrike" dirty="0" err="1">
+                <a:solidFill>
+                  <a:srgbClr val="000000"/>
+                </a:solidFill>
+                <a:effectLst/>
+                <a:uFillTx/>
+                <a:latin typeface="Arial"/>
+              </a:rPr>
+              <a:t>OTel</a:t>
+            </a:r>
             <a:r>
               <a:rPr lang="en-US" altLang="zh-HK" sz="2000" b="0" u="none" strike="noStrike" dirty="0">
                 <a:solidFill>
@@ -844,7 +941,23 @@
                 <a:uFillTx/>
                 <a:latin typeface="Arial"/>
               </a:rPr>
-              <a:t>https://www.youtube.com/watch?v=blkIGLlZePg</a:t>
+              <a:t> with Love </a:t>
+            </a:r>
+          </a:p>
+          <a:p>
+            <a:pPr indent="0" algn="l">
+              <a:buNone/>
+            </a:pPr>
+            <a:r>
+              <a:rPr lang="en-US" altLang="zh-HK" sz="2000" b="0" u="none" strike="noStrike" dirty="0">
+                <a:solidFill>
+                  <a:srgbClr val="000000"/>
+                </a:solidFill>
+                <a:effectLst/>
+                <a:uFillTx/>
+                <a:latin typeface="Arial"/>
+              </a:rPr>
+              <a:t>https://www.youtube.com/watch?v=FSrw6Fnmj1Q</a:t>
             </a:r>
           </a:p>
           <a:p>
@@ -921,7 +1034,7 @@
           <a:p>
             <a:r>
               <a:rPr lang="en-US" altLang="zh-HK" dirty="0"/>
-              <a:t>Core Topic: Deterministic Triggers, Bounded Hypotheses, and Targeted Verification</a:t>
+              <a:t>Core Topic: Large Media Telemetry, Distilled Reasoning, and Agent Trajectories</a:t>
             </a:r>
           </a:p>
           <a:p>
@@ -930,31 +1043,7 @@
           <a:p>
             <a:r>
               <a:rPr lang="en-US" altLang="zh-HK" dirty="0"/>
-              <a:t>If backward inference fails, how should AI be applied to operations? </a:t>
-            </a:r>
-            <a:r>
-              <a:rPr lang="en-US" altLang="zh-HK" b="1" dirty="0"/>
-              <a:t>Simulate the human, not the universe</a:t>
-            </a:r>
-            <a:r>
-              <a:rPr lang="en-US" altLang="zh-HK" dirty="0"/>
-              <a:t>.</a:t>
-            </a:r>
-          </a:p>
-          <a:p>
-            <a:r>
-              <a:rPr lang="en-US" altLang="zh-HK" b="1" dirty="0"/>
-              <a:t>Core Insight</a:t>
-            </a:r>
-            <a:r>
-              <a:rPr lang="en-US" altLang="zh-HK" dirty="0"/>
-              <a:t>: The number of bad things that can happen in a distributed system is infinite. However, the bounded set of steps a human expert takes to debug them is manageable and structured. </a:t>
-            </a:r>
-          </a:p>
-          <a:p>
-            <a:r>
-              <a:rPr lang="en-US" altLang="zh-HK" dirty="0"/>
-              <a:t>Look at the 3-step operational loop on this slide: </a:t>
+              <a:t>As we look to the immediate future, observability standards must evolve to tackle three massive engineering frontiers: </a:t>
             </a:r>
           </a:p>
           <a:p>
@@ -964,11 +1053,11 @@
             </a:pPr>
             <a:r>
               <a:rPr lang="en-US" altLang="zh-HK" b="1" dirty="0"/>
-              <a:t>Deterministic Trigger</a:t>
-            </a:r>
-            <a:r>
-              <a:rPr lang="en-US" altLang="zh-HK" dirty="0"/>
-              <a:t>: Wait for a specific, out-of-norm signal (e.g., 'resource buffer empty') rather than chasing lagging alert spikes. </a:t>
+              <a:t>Large Media Telemetry</a:t>
+            </a:r>
+            <a:r>
+              <a:rPr lang="en-US" altLang="zh-HK" dirty="0"/>
+              <a:t>: Tracing massive context windows featuring high-resolution video and audio payloads by utilizing blob-storage offloading rather than bloating trace backends. </a:t>
             </a:r>
           </a:p>
           <a:p>
@@ -978,11 +1067,11 @@
             </a:pPr>
             <a:r>
               <a:rPr lang="en-US" altLang="zh-HK" b="1" dirty="0"/>
-              <a:t>Hypothesis Generation</a:t>
-            </a:r>
-            <a:r>
-              <a:rPr lang="en-US" altLang="zh-HK" dirty="0"/>
-              <a:t>: The AI reviews the specific code generating the error and builds a bounded list of causal chains. </a:t>
+              <a:t>Distilled Reasoning</a:t>
+            </a:r>
+            <a:r>
+              <a:rPr lang="en-US" altLang="zh-HK" dirty="0"/>
+              <a:t>: Extracting observability data from native foundation model reasoning blocks (the 'thinking' tokens) that are often hidden or redacted by API providers. </a:t>
             </a:r>
           </a:p>
           <a:p>
@@ -992,11 +1081,25 @@
             </a:pPr>
             <a:r>
               <a:rPr lang="en-US" altLang="zh-HK" b="1" dirty="0"/>
-              <a:t>Verification</a:t>
-            </a:r>
-            <a:r>
-              <a:rPr lang="en-US" altLang="zh-HK" dirty="0"/>
-              <a:t>: The AI runs targeted experiments to verify which specific hypothesis fits the live data pattern. </a:t>
+              <a:t>Agent Trajectories</a:t>
+            </a:r>
+            <a:r>
+              <a:rPr lang="en-US" altLang="zh-HK" dirty="0"/>
+              <a:t>: Federating agent memory, graph stores, and computer-use actions into distinct, agile </a:t>
+            </a:r>
+            <a:r>
+              <a:rPr lang="en-US" altLang="zh-HK" dirty="0" err="1"/>
+              <a:t>OpenTelemetry</a:t>
+            </a:r>
+            <a:r>
+              <a:rPr lang="en-US" altLang="zh-HK" dirty="0"/>
+              <a:t> working groups. </a:t>
+            </a:r>
+          </a:p>
+          <a:p>
+            <a:r>
+              <a:rPr lang="en-US" altLang="zh-HK" dirty="0"/>
+              <a:t>The telemetry of tomorrow must capture sight, sound, and autonomous thought. </a:t>
             </a:r>
             <a:endParaRPr lang="zh-HK" altLang="en-US" dirty="0"/>
           </a:p>
@@ -1020,7 +1123,7 @@
             <a:pPr indent="0" algn="r">
               <a:buNone/>
             </a:pPr>
-            <a:fld id="{4B24A35B-39E5-4CF7-97A8-7C1CF04ED6D0}" type="slidenum">
+            <a:fld id="{03BF6639-CE35-421B-B729-02326B35E96D}" type="slidenum">
               <a:rPr lang="en-US" sz="1400" b="0" u="none" strike="noStrike" smtClean="0">
                 <a:solidFill>
                   <a:srgbClr val="000000"/>
@@ -1045,7 +1148,7 @@
     </p:spTree>
     <p:extLst>
       <p:ext uri="{BB962C8B-B14F-4D97-AF65-F5344CB8AC3E}">
-        <p14:creationId xmlns:p14="http://schemas.microsoft.com/office/powerpoint/2010/main" val="3164710079"/>
+        <p14:creationId xmlns:p14="http://schemas.microsoft.com/office/powerpoint/2010/main" val="1987905287"/>
       </p:ext>
     </p:extLst>
   </p:cSld>
@@ -1106,7 +1209,7 @@
           <a:p>
             <a:r>
               <a:rPr lang="en-US" altLang="zh-HK" dirty="0"/>
-              <a:t>Core Topic: Real-Time Upstream Filtering to Reduce Observability Costs by 90%</a:t>
+              <a:t>Core Topic: Using AI to Create Standards for AI Instrumentation</a:t>
             </a:r>
           </a:p>
           <a:p>
@@ -1115,59 +1218,39 @@
           <a:p>
             <a:r>
               <a:rPr lang="en-US" altLang="zh-HK" dirty="0"/>
-              <a:t>How do we make this architecture practical at petabyte scale? Through </a:t>
-            </a:r>
+              <a:t>Let's reflect on the ultimate irony and brilliance of this movement, captured by the quote on this slide from Mikio Kang at </a:t>
+            </a:r>
+            <a:r>
+              <a:rPr lang="en-US" altLang="zh-HK" dirty="0" err="1"/>
+              <a:t>Arize</a:t>
+            </a:r>
+            <a:r>
+              <a:rPr lang="en-US" altLang="zh-HK" dirty="0"/>
+              <a:t>: </a:t>
+            </a:r>
+          </a:p>
+          <a:p>
+            <a:r>
+              <a:rPr lang="en-US" altLang="zh-HK" i="1" dirty="0"/>
+              <a:t>‘Think about it. We are using AI to create standards for another AI to write instrumentation for itself.’</a:t>
+            </a:r>
+          </a:p>
+          <a:p>
             <a:r>
               <a:rPr lang="en-US" altLang="zh-HK" b="1" dirty="0"/>
-              <a:t>Upstream Telemetry Filtering</a:t>
-            </a:r>
-            <a:r>
-              <a:rPr lang="en-US" altLang="zh-HK" dirty="0"/>
-              <a:t>. </a:t>
-            </a:r>
-          </a:p>
-          <a:p>
-            <a:r>
-              <a:rPr lang="en-US" altLang="zh-HK" dirty="0"/>
-              <a:t>Look at the architectural stack on this slide: </a:t>
-            </a:r>
-          </a:p>
-          <a:p>
-            <a:pPr marL="171450" indent="-171450">
-              <a:buFont typeface="Arial" panose="020B0604020202020204" pitchFamily="34" charset="0"/>
-              <a:buChar char="•"/>
-            </a:pPr>
-            <a:r>
-              <a:rPr lang="en-US" altLang="zh-HK" dirty="0"/>
-              <a:t>Instead of passing all raw log noise downstream to expensive monitoring platforms, logs are scanned in real-time at the source before leaving the node. </a:t>
-            </a:r>
-          </a:p>
-          <a:p>
-            <a:pPr marL="171450" indent="-171450">
-              <a:buFont typeface="Arial" panose="020B0604020202020204" pitchFamily="34" charset="0"/>
-              <a:buChar char="•"/>
-            </a:pPr>
-            <a:r>
-              <a:rPr lang="en-US" altLang="zh-HK" dirty="0"/>
-              <a:t>Only when a new pattern emerges—a true perturbation or anomaly in the environment—is that isolated signal lifted to the AI reasoning layer. </a:t>
-            </a:r>
-          </a:p>
-          <a:p>
-            <a:r>
-              <a:rPr lang="en-US" altLang="zh-HK" b="1" dirty="0"/>
-              <a:t>The Result</a:t>
-            </a:r>
-            <a:r>
-              <a:rPr lang="en-US" altLang="zh-HK" dirty="0"/>
-              <a:t>: This approach reduces observability costs by up to </a:t>
-            </a:r>
-            <a:r>
-              <a:rPr lang="en-US" altLang="zh-HK" b="1" dirty="0"/>
-              <a:t>90%</a:t>
-            </a:r>
-            <a:r>
-              <a:rPr lang="en-US" altLang="zh-HK" dirty="0"/>
-              <a:t> while providing the AI with the exact, deterministic starting point it needs to begin running debugging hypotheses. </a:t>
+              <a:t>Synthesis</a:t>
+            </a:r>
+            <a:r>
+              <a:rPr lang="en-US" altLang="zh-HK" dirty="0"/>
+              <a:t>: The ultimate goal of standardizing </a:t>
+            </a:r>
+            <a:r>
+              <a:rPr lang="en-US" altLang="zh-HK" dirty="0" err="1"/>
+              <a:t>GenAI</a:t>
+            </a:r>
+            <a:r>
+              <a:rPr lang="en-US" altLang="zh-HK" dirty="0"/>
+              <a:t> telemetry is not just for human engineers. Because agentic paths are non-deterministic and write their own execution code, future autonomous agents will actually need standardized telemetry to read, audit, and understand their own logic. Observability has become recursive. </a:t>
             </a:r>
             <a:endParaRPr lang="zh-HK" altLang="en-US" dirty="0"/>
           </a:p>
@@ -1191,7 +1274,7 @@
             <a:pPr indent="0" algn="r">
               <a:buNone/>
             </a:pPr>
-            <a:fld id="{4B24A35B-39E5-4CF7-97A8-7C1CF04ED6D0}" type="slidenum">
+            <a:fld id="{03BF6639-CE35-421B-B729-02326B35E96D}" type="slidenum">
               <a:rPr lang="en-US" sz="1400" b="0" u="none" strike="noStrike" smtClean="0">
                 <a:solidFill>
                   <a:srgbClr val="000000"/>
@@ -1216,7 +1299,7 @@
     </p:spTree>
     <p:extLst>
       <p:ext uri="{BB962C8B-B14F-4D97-AF65-F5344CB8AC3E}">
-        <p14:creationId xmlns:p14="http://schemas.microsoft.com/office/powerpoint/2010/main" val="2871944684"/>
+        <p14:creationId xmlns:p14="http://schemas.microsoft.com/office/powerpoint/2010/main" val="2557838527"/>
       </p:ext>
     </p:extLst>
   </p:cSld>
@@ -1277,7 +1360,7 @@
           <a:p>
             <a:r>
               <a:rPr lang="en-US" altLang="zh-HK" dirty="0"/>
-              <a:t>Core Topic: Architectural Convergence and Constrained Environments</a:t>
+              <a:t>Core Topic: Comprehensive Summary of Strategic Alignment</a:t>
             </a:r>
           </a:p>
           <a:p>
@@ -1286,31 +1369,85 @@
           <a:p>
             <a:r>
               <a:rPr lang="en-US" altLang="zh-HK" dirty="0"/>
-              <a:t>This brings us to the ultimate strategic realization of the AI era: </a:t>
-            </a:r>
+              <a:t>This final summary slide maps out the entire journey of the </a:t>
+            </a:r>
+            <a:r>
+              <a:rPr lang="en-US" altLang="zh-HK" dirty="0" err="1"/>
+              <a:t>OpenInference</a:t>
+            </a:r>
+            <a:r>
+              <a:rPr lang="en-US" altLang="zh-HK" dirty="0"/>
+              <a:t> Donation: </a:t>
+            </a:r>
+          </a:p>
+          <a:p>
+            <a:pPr marL="171450" indent="-171450">
+              <a:buFont typeface="Arial" panose="020B0604020202020204" pitchFamily="34" charset="0"/>
+              <a:buChar char="•"/>
+            </a:pPr>
             <a:r>
               <a:rPr lang="en-US" altLang="zh-HK" b="1" dirty="0"/>
-              <a:t>The Event Horizon</a:t>
-            </a:r>
-            <a:r>
-              <a:rPr lang="en-US" altLang="zh-HK" dirty="0"/>
-              <a:t>. </a:t>
-            </a:r>
-          </a:p>
-          <a:p>
-            <a:r>
-              <a:rPr lang="en-US" altLang="zh-HK" dirty="0"/>
-              <a:t>Think about the history of robotics: Just as physical robotics required us to build structured, standardized warehouses (like Amazon fulfillment centers) rather than giving robots general human mobility across chaotic streets, AI operations will force similar architectural changes. </a:t>
-            </a:r>
-          </a:p>
-          <a:p>
+              <a:t>Strategic Alignment</a:t>
+            </a:r>
+            <a:r>
+              <a:rPr lang="en-US" altLang="zh-HK" dirty="0"/>
+              <a:t>: </a:t>
+            </a:r>
+            <a:r>
+              <a:rPr lang="en-US" altLang="zh-HK" dirty="0" err="1"/>
+              <a:t>Arize</a:t>
+            </a:r>
+            <a:r>
+              <a:rPr lang="en-US" altLang="zh-HK" dirty="0"/>
+              <a:t> formally donated </a:t>
+            </a:r>
+            <a:r>
+              <a:rPr lang="en-US" altLang="zh-HK" dirty="0" err="1"/>
+              <a:t>OpenInference</a:t>
+            </a:r>
+            <a:r>
+              <a:rPr lang="en-US" altLang="zh-HK" dirty="0"/>
+              <a:t> to establish vendor-neutral AI observability standards. </a:t>
+            </a:r>
+          </a:p>
+          <a:p>
+            <a:pPr marL="171450" indent="-171450">
+              <a:buFont typeface="Arial" panose="020B0604020202020204" pitchFamily="34" charset="0"/>
+              <a:buChar char="•"/>
+            </a:pPr>
             <a:r>
               <a:rPr lang="en-US" altLang="zh-HK" b="1" dirty="0"/>
-              <a:t>Takeaway</a:t>
-            </a:r>
-            <a:r>
-              <a:rPr lang="en-US" altLang="zh-HK" dirty="0"/>
-              <a:t>: We may never solve the infinite state space of legacy, unconstrained distributed systems. Instead, we will intentionally design highly constrained, standardized, computationally reducible environments that AI can perfectly simulate and manage. </a:t>
+              <a:t>Accelerating Agentic Observability</a:t>
+            </a:r>
+            <a:r>
+              <a:rPr lang="en-US" altLang="zh-HK" dirty="0"/>
+              <a:t>: Multi-step agents require standard tracing across infrastructure, massive context windows, and execution boundaries. </a:t>
+            </a:r>
+          </a:p>
+          <a:p>
+            <a:pPr marL="171450" indent="-171450">
+              <a:buFont typeface="Arial" panose="020B0604020202020204" pitchFamily="34" charset="0"/>
+              <a:buChar char="•"/>
+            </a:pPr>
+            <a:r>
+              <a:rPr lang="en-US" altLang="zh-HK" b="1" dirty="0"/>
+              <a:t>The Collaborative Future</a:t>
+            </a:r>
+            <a:r>
+              <a:rPr lang="en-US" altLang="zh-HK" dirty="0"/>
+              <a:t>: CNCF governance and technical committees cleared Apache 2.0 licensing, uniting the 'Tip of the Spear' (rapid edge experimentation) with the 'Foundational Standard' (stable telemetry specs). </a:t>
+            </a:r>
+          </a:p>
+          <a:p>
+            <a:r>
+              <a:rPr lang="en-US" altLang="zh-HK" dirty="0"/>
+              <a:t>By bridging rapid innovation with foundational governance, the cloud-native community has secured a unified observability future for the age of agents. </a:t>
+            </a:r>
+          </a:p>
+          <a:p>
+            <a:r>
+              <a:rPr lang="en-US" altLang="zh-HK" dirty="0"/>
+              <a:t>Thank you! Let's open the floor to questions. </a:t>
             </a:r>
             <a:endParaRPr lang="zh-HK" altLang="en-US" dirty="0"/>
           </a:p>
@@ -1334,7 +1471,7 @@
             <a:pPr indent="0" algn="r">
               <a:buNone/>
             </a:pPr>
-            <a:fld id="{4B24A35B-39E5-4CF7-97A8-7C1CF04ED6D0}" type="slidenum">
+            <a:fld id="{03BF6639-CE35-421B-B729-02326B35E96D}" type="slidenum">
               <a:rPr lang="en-US" sz="1400" b="0" u="none" strike="noStrike" smtClean="0">
                 <a:solidFill>
                   <a:srgbClr val="000000"/>
@@ -1359,160 +1496,7 @@
     </p:spTree>
     <p:extLst>
       <p:ext uri="{BB962C8B-B14F-4D97-AF65-F5344CB8AC3E}">
-        <p14:creationId xmlns:p14="http://schemas.microsoft.com/office/powerpoint/2010/main" val="3323012853"/>
-      </p:ext>
-    </p:extLst>
-  </p:cSld>
-  <p:clrMapOvr>
-    <a:masterClrMapping/>
-  </p:clrMapOvr>
-</p:notes>
-</file>
-
-<file path=ppt/notesSlides/notesSlide13.xml><?xml version="1.0" encoding="utf-8"?>
-<p:notes xmlns:a="http://schemas.openxmlformats.org/drawingml/2006/main" xmlns:r="http://schemas.openxmlformats.org/officeDocument/2006/relationships" xmlns:p="http://schemas.openxmlformats.org/presentationml/2006/main">
-  <p:cSld>
-    <p:spTree>
-      <p:nvGrpSpPr>
-        <p:cNvPr id="1" name=""/>
-        <p:cNvGrpSpPr/>
-        <p:nvPr/>
-      </p:nvGrpSpPr>
-      <p:grpSpPr>
-        <a:xfrm>
-          <a:off x="0" y="0"/>
-          <a:ext cx="0" cy="0"/>
-          <a:chOff x="0" y="0"/>
-          <a:chExt cx="0" cy="0"/>
-        </a:xfrm>
-      </p:grpSpPr>
-      <p:sp>
-        <p:nvSpPr>
-          <p:cNvPr id="2" name="投影片影像版面配置區 1"/>
-          <p:cNvSpPr>
-            <a:spLocks noGrp="1" noRot="1" noChangeAspect="1"/>
-          </p:cNvSpPr>
-          <p:nvPr>
-            <p:ph type="sldImg"/>
-          </p:nvPr>
-        </p:nvSpPr>
-        <p:spPr>
-          <a:xfrm>
-            <a:off x="0" y="812800"/>
-            <a:ext cx="0" cy="0"/>
-          </a:xfrm>
-        </p:spPr>
-      </p:sp>
-      <p:sp>
-        <p:nvSpPr>
-          <p:cNvPr id="3" name="備忘稿版面配置區 2"/>
-          <p:cNvSpPr>
-            <a:spLocks noGrp="1"/>
-          </p:cNvSpPr>
-          <p:nvPr>
-            <p:ph type="body" idx="1"/>
-          </p:nvPr>
-        </p:nvSpPr>
-        <p:spPr/>
-        <p:txBody>
-          <a:bodyPr/>
-          <a:lstStyle/>
-          <a:p>
-            <a:r>
-              <a:rPr lang="en-US" altLang="zh-HK" dirty="0"/>
-              <a:t>Core Topic: Comprehensive Comparison of Code Generation vs. Runtime Operations</a:t>
-            </a:r>
-          </a:p>
-          <a:p>
-            <a:endParaRPr lang="en-US" altLang="zh-HK" dirty="0"/>
-          </a:p>
-          <a:p>
-            <a:r>
-              <a:rPr lang="en-US" altLang="zh-HK" dirty="0"/>
-              <a:t>Let's summarize the overarching theme of this presentation comparing development and operations: </a:t>
-            </a:r>
-          </a:p>
-          <a:p>
-            <a:pPr marL="171450" indent="-171450">
-              <a:buFont typeface="Arial" panose="020B0604020202020204" pitchFamily="34" charset="0"/>
-              <a:buChar char="•"/>
-            </a:pPr>
-            <a:r>
-              <a:rPr lang="en-US" altLang="zh-HK" b="1" dirty="0"/>
-              <a:t>AI in Code Generation (Syntax)</a:t>
-            </a:r>
-            <a:r>
-              <a:rPr lang="en-US" altLang="zh-HK" dirty="0"/>
-              <a:t>: Achieves 10x to 20x developer speedups because public codebases provide ideal digital training distributions within a constrained training space. </a:t>
-            </a:r>
-          </a:p>
-          <a:p>
-            <a:pPr marL="171450" indent="-171450">
-              <a:buFont typeface="Arial" panose="020B0604020202020204" pitchFamily="34" charset="0"/>
-              <a:buChar char="•"/>
-            </a:pPr>
-            <a:r>
-              <a:rPr lang="en-US" altLang="zh-HK" b="1" dirty="0"/>
-              <a:t>AI in System Operations (Semantics)</a:t>
-            </a:r>
-            <a:r>
-              <a:rPr lang="en-US" altLang="zh-HK" dirty="0"/>
-              <a:t>: Faces explosive runtime complexity because production environments introduce exponential state spaces and dynamic traffic patterns that static code cannot predict. </a:t>
-            </a:r>
-          </a:p>
-          <a:p>
-            <a:r>
-              <a:rPr lang="en-US" altLang="zh-HK" dirty="0"/>
-              <a:t>Writing code is an intellectual puzzle; keeping systems running is an ongoing battle against entropy. </a:t>
-            </a:r>
-            <a:endParaRPr lang="zh-HK" altLang="en-US" dirty="0"/>
-          </a:p>
-        </p:txBody>
-      </p:sp>
-      <p:sp>
-        <p:nvSpPr>
-          <p:cNvPr id="4" name="投影片編號版面配置區 3"/>
-          <p:cNvSpPr>
-            <a:spLocks noGrp="1"/>
-          </p:cNvSpPr>
-          <p:nvPr>
-            <p:ph type="sldNum" idx="36"/>
-          </p:nvPr>
-        </p:nvSpPr>
-        <p:spPr/>
-        <p:txBody>
-          <a:bodyPr/>
-          <a:lstStyle/>
-          <a:p>
-            <a:pPr indent="0" algn="r">
-              <a:buNone/>
-            </a:pPr>
-            <a:fld id="{4B24A35B-39E5-4CF7-97A8-7C1CF04ED6D0}" type="slidenum">
-              <a:rPr lang="en-US" sz="1400" b="0" u="none" strike="noStrike" smtClean="0">
-                <a:solidFill>
-                  <a:srgbClr val="000000"/>
-                </a:solidFill>
-                <a:effectLst/>
-                <a:uFillTx/>
-                <a:latin typeface="Times New Roman"/>
-              </a:rPr>
-              <a:t>13</a:t>
-            </a:fld>
-            <a:endParaRPr lang="en-US" sz="1400" b="0" u="none" strike="noStrike">
-              <a:solidFill>
-                <a:srgbClr val="000000"/>
-              </a:solidFill>
-              <a:effectLst/>
-              <a:uFillTx/>
-              <a:latin typeface="Times New Roman"/>
-            </a:endParaRPr>
-          </a:p>
-        </p:txBody>
-      </p:sp>
-    </p:spTree>
-    <p:extLst>
-      <p:ext uri="{BB962C8B-B14F-4D97-AF65-F5344CB8AC3E}">
-        <p14:creationId xmlns:p14="http://schemas.microsoft.com/office/powerpoint/2010/main" val="2754629033"/>
+        <p14:creationId xmlns:p14="http://schemas.microsoft.com/office/powerpoint/2010/main" val="68581544"/>
       </p:ext>
     </p:extLst>
   </p:cSld>
@@ -1573,7 +1557,7 @@
           <a:p>
             <a:r>
               <a:rPr lang="en-US" altLang="zh-HK" dirty="0"/>
-              <a:t>Core Topic: Defining the Boundary Between Code Generation and Runtime Execution</a:t>
+              <a:t>Core Topic: Traditional Telemetry vs. Agentic Telemetry</a:t>
             </a:r>
           </a:p>
           <a:p>
@@ -1582,7 +1566,7 @@
           <a:p>
             <a:r>
               <a:rPr lang="en-US" altLang="zh-HK" dirty="0"/>
-              <a:t>To understand the current engineering bottleneck, we must separate two distinct concepts: Syntax and Semantics. Look at the side-by-side comparison on this slide: </a:t>
+              <a:t>To appreciate the current standardization effort, we must first examine the massive gulf between traditional monitoring and modern AI workloads. Look at the comparison on this slide: </a:t>
             </a:r>
           </a:p>
           <a:p>
@@ -1592,11 +1576,11 @@
             </a:pPr>
             <a:r>
               <a:rPr lang="en-US" altLang="zh-HK" b="1" dirty="0"/>
-              <a:t>Syntax (Writing Code)</a:t>
-            </a:r>
-            <a:r>
-              <a:rPr lang="en-US" altLang="zh-HK" dirty="0"/>
-              <a:t>: This is the characters typed—the digital, bounded instructions. The environment is perfectly constrained, and the distribution of the solution space neatly matches the training set of public codebases. AI Status: Solved. We are seeing wildfire adoption and exponential developer productivity gains. </a:t>
+              <a:t>Traditional Telemetry</a:t>
+            </a:r>
+            <a:r>
+              <a:rPr lang="en-US" altLang="zh-HK" dirty="0"/>
+              <a:t>: Built on deterministic code paths, standard HTTP/RPC protocols, and lightweight strings. The boundaries of your system were predictable, and failures were localized. </a:t>
             </a:r>
           </a:p>
           <a:p>
@@ -1606,17 +1590,25 @@
             </a:pPr>
             <a:r>
               <a:rPr lang="en-US" altLang="zh-HK" b="1" dirty="0"/>
-              <a:t>Semantics (Running Code)</a:t>
-            </a:r>
-            <a:r>
-              <a:rPr lang="en-US" altLang="zh-HK" dirty="0"/>
-              <a:t>: This is what the machine actually does at runtime. The environment is heavy-tailed, physical, and subject to real-world anomalies like traffic spikes, network partitions, and hardware failures. AI Status: The Hard Frontier. Predicting failures in unbounded state spaces remains an open challenge. </a:t>
-            </a:r>
-          </a:p>
-          <a:p>
-            <a:r>
-              <a:rPr lang="en-US" altLang="zh-HK" dirty="0"/>
-              <a:t>Writing static instructions is easy for a probabilistic model; predicting dynamic system behavior under load is entirely different. </a:t>
+              <a:t>Agentic Telemetry</a:t>
+            </a:r>
+            <a:r>
+              <a:rPr lang="en-US" altLang="zh-HK" dirty="0"/>
+              <a:t>: Driven by non-deterministic reasoning loops. Payloads now consist of massive context windows, multimodal video and audio data, and complex token structures. The nature of execution is volatile, featuring multi-step retrieval loops and dynamic tool use. </a:t>
+            </a:r>
+          </a:p>
+          <a:p>
+            <a:pPr marL="0" indent="0">
+              <a:buFont typeface="Arial" panose="020B0604020202020204" pitchFamily="34" charset="0"/>
+              <a:buNone/>
+            </a:pPr>
+            <a:r>
+              <a:rPr lang="en-US" altLang="zh-HK" b="1" dirty="0"/>
+              <a:t>The Key Takeaway</a:t>
+            </a:r>
+            <a:r>
+              <a:rPr lang="en-US" altLang="zh-HK" dirty="0"/>
+              <a:t>: You cannot monitor a probabilistic, autonomous AI agent with tools designed for static web servers. The entire data structure of telemetry had to be reinvented. </a:t>
             </a:r>
             <a:endParaRPr lang="zh-HK" altLang="en-US" dirty="0"/>
           </a:p>
@@ -1640,7 +1632,7 @@
             <a:pPr indent="0" algn="r">
               <a:buNone/>
             </a:pPr>
-            <a:fld id="{4B24A35B-39E5-4CF7-97A8-7C1CF04ED6D0}" type="slidenum">
+            <a:fld id="{03BF6639-CE35-421B-B729-02326B35E96D}" type="slidenum">
               <a:rPr lang="en-US" sz="1400" b="0" u="none" strike="noStrike" smtClean="0">
                 <a:solidFill>
                   <a:srgbClr val="000000"/>
@@ -1665,7 +1657,7 @@
     </p:spTree>
     <p:extLst>
       <p:ext uri="{BB962C8B-B14F-4D97-AF65-F5344CB8AC3E}">
-        <p14:creationId xmlns:p14="http://schemas.microsoft.com/office/powerpoint/2010/main" val="3998595473"/>
+        <p14:creationId xmlns:p14="http://schemas.microsoft.com/office/powerpoint/2010/main" val="3959019244"/>
       </p:ext>
     </p:extLst>
   </p:cSld>
@@ -1726,7 +1718,7 @@
           <a:p>
             <a:r>
               <a:rPr lang="en-US" altLang="zh-HK" dirty="0"/>
-              <a:t>Core Topic: Evolution of the AI Engineer Stack and Persistent CLI Sub-Agents</a:t>
+              <a:t>Core Topic: Fragmented Telemetry and the 25+ Ways to Emit Tracing Data</a:t>
             </a:r>
           </a:p>
           <a:p>
@@ -1735,69 +1727,57 @@
           <a:p>
             <a:r>
               <a:rPr lang="en-US" altLang="zh-HK" dirty="0"/>
-              <a:t>How has the developer's actual workflow evolved over the last few years? Look at The </a:t>
+              <a:t>When the GPT-3 moment hit in early 2022, the speed of AI innovation drastically outpaced industry standards. Startups and framework providers rushed to build custom telemetry to understand what their models were doing, resulting in over </a:t>
             </a:r>
             <a:r>
               <a:rPr lang="en-US" altLang="zh-HK" b="1" dirty="0"/>
-              <a:t>AI Engineer Stack </a:t>
-            </a:r>
-            <a:r>
-              <a:rPr lang="en-US" altLang="zh-HK" dirty="0"/>
-              <a:t>illustrated on this slide: </a:t>
-            </a:r>
-          </a:p>
-          <a:p>
-            <a:pPr marL="171450" indent="-171450">
-              <a:buFont typeface="Arial" panose="020B0604020202020204" pitchFamily="34" charset="0"/>
-              <a:buChar char="•"/>
-            </a:pPr>
-            <a:r>
-              <a:rPr lang="en-US" altLang="zh-HK" dirty="0"/>
-              <a:t>We start with the developer's environment (e.g., Windows running WSL with Linux tooling). </a:t>
-            </a:r>
-          </a:p>
-          <a:p>
-            <a:pPr marL="171450" indent="-171450">
-              <a:buFont typeface="Arial" panose="020B0604020202020204" pitchFamily="34" charset="0"/>
-              <a:buChar char="•"/>
-            </a:pPr>
-            <a:r>
-              <a:rPr lang="en-US" altLang="zh-HK" dirty="0"/>
-              <a:t>The Human Architect acts as the orchestrator, reviewing design documents and dividing labor. </a:t>
-            </a:r>
-          </a:p>
-          <a:p>
-            <a:pPr marL="171450" indent="-171450">
-              <a:buFont typeface="Arial" panose="020B0604020202020204" pitchFamily="34" charset="0"/>
-              <a:buChar char="•"/>
-            </a:pPr>
-            <a:r>
-              <a:rPr lang="en-US" altLang="zh-HK" dirty="0"/>
-              <a:t>The primary AI model (such as Claude Opus) drives the workflow, delegating tasks to </a:t>
-            </a:r>
-            <a:r>
-              <a:rPr lang="en-US" altLang="zh-HK" b="1" dirty="0"/>
-              <a:t>Persistent CLI Sub-Agents</a:t>
-            </a:r>
-            <a:r>
-              <a:rPr lang="en-US" altLang="zh-HK" dirty="0"/>
-              <a:t>. </a:t>
-            </a:r>
-          </a:p>
-          <a:p>
-            <a:r>
-              <a:rPr lang="en-US" altLang="zh-HK" dirty="0"/>
-              <a:t>Notice the operational trick: unlike basic chat windows, these sub-agents maintain persistent CLI sessions, iterate together, and execute complex workflows without UI bloat. </a:t>
-            </a:r>
-          </a:p>
-          <a:p>
-            <a:r>
-              <a:rPr lang="en-US" altLang="zh-HK" b="1" dirty="0"/>
-              <a:t>The Insight</a:t>
-            </a:r>
-            <a:r>
-              <a:rPr lang="en-US" altLang="zh-HK" dirty="0"/>
-              <a:t>: The AI starts training the engineer. Top engineers adapt to these harnesses, managing context limits and orchestrating autonomous sub-agents rather than just typing lines of code. </a:t>
+              <a:t>25 fragmented ways </a:t>
+            </a:r>
+            <a:r>
+              <a:rPr lang="en-US" altLang="zh-HK" dirty="0"/>
+              <a:t>to emit tracing data. </a:t>
+            </a:r>
+          </a:p>
+          <a:p>
+            <a:r>
+              <a:rPr lang="en-US" altLang="zh-HK" dirty="0"/>
+              <a:t>Look at the quote on the right from </a:t>
+            </a:r>
+            <a:r>
+              <a:rPr lang="en-US" altLang="zh-HK" dirty="0" err="1"/>
+              <a:t>Liudmila</a:t>
+            </a:r>
+            <a:r>
+              <a:rPr lang="en-US" altLang="zh-HK" dirty="0"/>
+              <a:t> </a:t>
+            </a:r>
+            <a:r>
+              <a:rPr lang="en-US" altLang="zh-HK" dirty="0" err="1"/>
+              <a:t>Molkova</a:t>
+            </a:r>
+            <a:r>
+              <a:rPr lang="en-US" altLang="zh-HK" dirty="0"/>
+              <a:t> of the </a:t>
+            </a:r>
+            <a:r>
+              <a:rPr lang="en-US" altLang="zh-HK" dirty="0" err="1"/>
+              <a:t>OpenTelemetry</a:t>
+            </a:r>
+            <a:r>
+              <a:rPr lang="en-US" altLang="zh-HK" dirty="0"/>
+              <a:t> Technical Committee:</a:t>
+            </a:r>
+          </a:p>
+          <a:p>
+            <a:r>
+              <a:rPr lang="en-US" altLang="zh-HK" i="1" dirty="0"/>
+              <a:t>‘You cannot wait for consensus to form. If you work at a startup, you need to deliver a product to your users and converge after.’</a:t>
+            </a:r>
+          </a:p>
+          <a:p>
+            <a:r>
+              <a:rPr lang="en-US" altLang="zh-HK" dirty="0"/>
+              <a:t>That was the reality. Open Inference started precisely because startups couldn't wait around for committee approvals; they had to build raw instrumentation immediately. But fragmentation created chaos for enterprise engineering teams trying to unify their observability stacks. </a:t>
             </a:r>
             <a:endParaRPr lang="zh-HK" altLang="en-US" dirty="0"/>
           </a:p>
@@ -1821,7 +1801,7 @@
             <a:pPr indent="0" algn="r">
               <a:buNone/>
             </a:pPr>
-            <a:fld id="{4B24A35B-39E5-4CF7-97A8-7C1CF04ED6D0}" type="slidenum">
+            <a:fld id="{03BF6639-CE35-421B-B729-02326B35E96D}" type="slidenum">
               <a:rPr lang="en-US" sz="1400" b="0" u="none" strike="noStrike" smtClean="0">
                 <a:solidFill>
                   <a:srgbClr val="000000"/>
@@ -1846,7 +1826,7 @@
     </p:spTree>
     <p:extLst>
       <p:ext uri="{BB962C8B-B14F-4D97-AF65-F5344CB8AC3E}">
-        <p14:creationId xmlns:p14="http://schemas.microsoft.com/office/powerpoint/2010/main" val="1642099428"/>
+        <p14:creationId xmlns:p14="http://schemas.microsoft.com/office/powerpoint/2010/main" val="3247126376"/>
       </p:ext>
     </p:extLst>
   </p:cSld>
@@ -1907,7 +1887,7 @@
           <a:p>
             <a:r>
               <a:rPr lang="en-US" altLang="zh-HK" dirty="0"/>
-              <a:t>Core Topic: Case Study: Autonomous Data Lake Auto-Promotion (Shredding)</a:t>
+              <a:t>Core Topic: Failure Surfaces Beyond the LLM Call</a:t>
             </a:r>
           </a:p>
           <a:p>
@@ -1916,7 +1896,21 @@
           <a:p>
             <a:r>
               <a:rPr lang="en-US" altLang="zh-HK" dirty="0"/>
-              <a:t>To see what this looks like in practice, let's look at a concrete infrastructure case study featured on this slide: </a:t>
+              <a:t>Agents do not run as isolated functions; they operate as distributed services across network boundaries and infrastructure. </a:t>
+            </a:r>
+          </a:p>
+          <a:p>
+            <a:r>
+              <a:rPr lang="en-US" altLang="zh-HK" dirty="0"/>
+              <a:t>Look at the </a:t>
+            </a:r>
+            <a:r>
+              <a:rPr lang="en-US" altLang="zh-HK" b="1" dirty="0"/>
+              <a:t>Agent Trajectory Blueprint </a:t>
+            </a:r>
+            <a:r>
+              <a:rPr lang="en-US" altLang="zh-HK" dirty="0"/>
+              <a:t>on this slide: </a:t>
             </a:r>
           </a:p>
           <a:p>
@@ -1925,16 +1919,12 @@
               <a:buChar char="•"/>
             </a:pPr>
             <a:r>
+              <a:rPr lang="en-US" altLang="zh-HK" dirty="0"/>
+              <a:t>A user sends a </a:t>
+            </a:r>
+            <a:r>
               <a:rPr lang="en-US" altLang="zh-HK" b="1" dirty="0"/>
-              <a:t>The Old Reality</a:t>
-            </a:r>
-            <a:r>
-              <a:rPr lang="en-US" altLang="zh-HK" dirty="0"/>
-              <a:t>: For a single senior engineer to manually coordinate metadata systems, commits, and concurrent writers to convert semi-structured logs into columnar parquet/iceberg files (data lake shredding) used to take roughly </a:t>
-            </a:r>
-            <a:r>
-              <a:rPr lang="en-US" altLang="zh-HK" b="1" dirty="0"/>
-              <a:t>6 months</a:t>
+              <a:t>Prompt</a:t>
             </a:r>
             <a:r>
               <a:rPr lang="en-US" altLang="zh-HK" dirty="0"/>
@@ -1947,16 +1937,66 @@
               <a:buChar char="•"/>
             </a:pPr>
             <a:r>
+              <a:rPr lang="en-US" altLang="zh-HK" dirty="0"/>
+              <a:t>The agent executes a </a:t>
+            </a:r>
+            <a:r>
               <a:rPr lang="en-US" altLang="zh-HK" b="1" dirty="0"/>
-              <a:t>The AI Reality</a:t>
-            </a:r>
-            <a:r>
-              <a:rPr lang="en-US" altLang="zh-HK" dirty="0"/>
-              <a:t>: Using agentic workflows, the same architecture was built and deployed in roughly </a:t>
+              <a:t>Retrieval (RAG)</a:t>
+            </a:r>
+            <a:r>
+              <a:rPr lang="en-US" altLang="zh-HK" dirty="0"/>
+              <a:t> step, pulling data from vector databases. </a:t>
+            </a:r>
+          </a:p>
+          <a:p>
+            <a:pPr marL="171450" indent="-171450">
+              <a:buFont typeface="Arial" panose="020B0604020202020204" pitchFamily="34" charset="0"/>
+              <a:buChar char="•"/>
+            </a:pPr>
+            <a:r>
+              <a:rPr lang="en-US" altLang="zh-HK" dirty="0"/>
+              <a:t>The system </a:t>
             </a:r>
             <a:r>
               <a:rPr lang="en-US" altLang="zh-HK" b="1" dirty="0"/>
-              <a:t>10 days</a:t>
+              <a:t>Evaluates</a:t>
+            </a:r>
+            <a:r>
+              <a:rPr lang="en-US" altLang="zh-HK" dirty="0"/>
+              <a:t> the retrieved context. </a:t>
+            </a:r>
+          </a:p>
+          <a:p>
+            <a:pPr marL="171450" indent="-171450">
+              <a:buFont typeface="Arial" panose="020B0604020202020204" pitchFamily="34" charset="0"/>
+              <a:buChar char="•"/>
+            </a:pPr>
+            <a:r>
+              <a:rPr lang="en-US" altLang="zh-HK" dirty="0"/>
+              <a:t>The model invokes external </a:t>
+            </a:r>
+            <a:r>
+              <a:rPr lang="en-US" altLang="zh-HK" b="1" dirty="0"/>
+              <a:t>Tool Use </a:t>
+            </a:r>
+            <a:r>
+              <a:rPr lang="en-US" altLang="zh-HK" dirty="0"/>
+              <a:t>(APIs, code execution, web browsing). </a:t>
+            </a:r>
+          </a:p>
+          <a:p>
+            <a:pPr marL="171450" indent="-171450">
+              <a:buFont typeface="Arial" panose="020B0604020202020204" pitchFamily="34" charset="0"/>
+              <a:buChar char="•"/>
+            </a:pPr>
+            <a:r>
+              <a:rPr lang="en-US" altLang="zh-HK" dirty="0"/>
+              <a:t>Finally, it delivers the </a:t>
+            </a:r>
+            <a:r>
+              <a:rPr lang="en-US" altLang="zh-HK" b="1" dirty="0"/>
+              <a:t>Output</a:t>
             </a:r>
             <a:r>
               <a:rPr lang="en-US" altLang="zh-HK" dirty="0"/>
@@ -1966,7 +2006,7 @@
           <a:p>
             <a:r>
               <a:rPr lang="en-US" altLang="zh-HK" dirty="0"/>
-              <a:t>Over 20 massive Pull Requests were generated autonomously by AI. The human engineer acted solely as the final architecture reviewer. This represents a 10x to 20x velocity multiplier for new infrastructure development. </a:t>
+              <a:t>Notice the red warning icons across the pipeline. The LLM call itself is only a fraction of the failure surface. Telemetry must capture retrieval steps, reasoning blocks, and raw context windows across every single hop. </a:t>
             </a:r>
             <a:endParaRPr lang="zh-HK" altLang="en-US" dirty="0"/>
           </a:p>
@@ -1990,7 +2030,7 @@
             <a:pPr indent="0" algn="r">
               <a:buNone/>
             </a:pPr>
-            <a:fld id="{4B24A35B-39E5-4CF7-97A8-7C1CF04ED6D0}" type="slidenum">
+            <a:fld id="{03BF6639-CE35-421B-B729-02326B35E96D}" type="slidenum">
               <a:rPr lang="en-US" sz="1400" b="0" u="none" strike="noStrike" smtClean="0">
                 <a:solidFill>
                   <a:srgbClr val="000000"/>
@@ -2015,7 +2055,7 @@
     </p:spTree>
     <p:extLst>
       <p:ext uri="{BB962C8B-B14F-4D97-AF65-F5344CB8AC3E}">
-        <p14:creationId xmlns:p14="http://schemas.microsoft.com/office/powerpoint/2010/main" val="434832662"/>
+        <p14:creationId xmlns:p14="http://schemas.microsoft.com/office/powerpoint/2010/main" val="3523696692"/>
       </p:ext>
     </p:extLst>
   </p:cSld>
@@ -2076,7 +2116,15 @@
           <a:p>
             <a:r>
               <a:rPr lang="en-US" altLang="zh-HK" dirty="0"/>
-              <a:t>Core Topic: Why Generating Code Doesn't Guarantee Production Performance</a:t>
+              <a:t>Core Topic: Open Inference (Speed) vs. </a:t>
+            </a:r>
+            <a:r>
+              <a:rPr lang="en-US" altLang="zh-HK" dirty="0" err="1"/>
+              <a:t>OpenTelemetry</a:t>
+            </a:r>
+            <a:r>
+              <a:rPr lang="en-US" altLang="zh-HK" dirty="0"/>
+              <a:t> SIG (Foundation)</a:t>
             </a:r>
           </a:p>
           <a:p>
@@ -2085,21 +2133,7 @@
           <a:p>
             <a:r>
               <a:rPr lang="en-US" altLang="zh-HK" dirty="0"/>
-              <a:t>Even though generating the syntax for a distributed data store is solved, how that code performs at runtime is an entirely different matter. </a:t>
-            </a:r>
-          </a:p>
-          <a:p>
-            <a:r>
-              <a:rPr lang="en-US" altLang="zh-HK" dirty="0"/>
-              <a:t>Look at the decision tree branching out from a simple </a:t>
-            </a:r>
-            <a:r>
-              <a:rPr lang="en-US" altLang="zh-HK" b="1" dirty="0"/>
-              <a:t>SQL Query syntax </a:t>
-            </a:r>
-            <a:r>
-              <a:rPr lang="en-US" altLang="zh-HK" dirty="0"/>
-              <a:t>on this slide: </a:t>
+              <a:t>This initiative represents the collision of two completely different engineering cultures, as outlined on this slide: </a:t>
             </a:r>
           </a:p>
           <a:p>
@@ -2108,16 +2142,20 @@
               <a:buChar char="•"/>
             </a:pPr>
             <a:r>
-              <a:rPr lang="en-US" altLang="zh-HK" dirty="0"/>
-              <a:t>A single query branches into latency, throughput, resource contention, database load, index usage, connection pooling, data </a:t>
-            </a:r>
-            <a:r>
-              <a:rPr lang="en-US" altLang="zh-HK" dirty="0" err="1"/>
-              <a:t>sharding</a:t>
-            </a:r>
-            <a:r>
-              <a:rPr lang="en-US" altLang="zh-HK" dirty="0"/>
-              <a:t>, and replication lag. </a:t>
+              <a:rPr lang="en-US" altLang="zh-HK" b="1" dirty="0"/>
+              <a:t>Open Inference (</a:t>
+            </a:r>
+            <a:r>
+              <a:rPr lang="en-US" altLang="zh-HK" b="1" dirty="0" err="1"/>
+              <a:t>Arize</a:t>
+            </a:r>
+            <a:r>
+              <a:rPr lang="en-US" altLang="zh-HK" b="1" dirty="0"/>
+              <a:t>) – The Tip of the Spear</a:t>
+            </a:r>
+            <a:r>
+              <a:rPr lang="en-US" altLang="zh-HK" dirty="0"/>
+              <a:t>: Its primary goal was raw instrumentation for immediate use. It operated at high speed—acting as the canary in the coal mine. It delivered over 80+ active instrumentations across Go, Java, TypeScript, and Python. </a:t>
             </a:r>
           </a:p>
           <a:p>
@@ -2126,18 +2164,38 @@
               <a:buChar char="•"/>
             </a:pPr>
             <a:r>
-              <a:rPr lang="en-US" altLang="zh-HK" dirty="0"/>
-              <a:t>These branch further into access patterns (read vs. write heavy), caching trade-offs, and network traffic locking. </a:t>
-            </a:r>
-          </a:p>
-          <a:p>
+              <a:rPr lang="en-US" altLang="zh-HK" b="1" dirty="0" err="1"/>
+              <a:t>OpenTelemetry</a:t>
+            </a:r>
             <a:r>
               <a:rPr lang="en-US" altLang="zh-HK" b="1" dirty="0"/>
-              <a:t>Takeaway</a:t>
-            </a:r>
-            <a:r>
-              <a:rPr lang="en-US" altLang="zh-HK" dirty="0"/>
-              <a:t>: AI can generate the application architecture and write the queries. But without grounding in live traffic data and production experimentation, it cannot reason about memory allocation or eventual consistency under load. Syntax cannot predict runtime reality. </a:t>
+              <a:t> </a:t>
+            </a:r>
+            <a:r>
+              <a:rPr lang="en-US" altLang="zh-HK" b="1" dirty="0" err="1"/>
+              <a:t>GenAI</a:t>
+            </a:r>
+            <a:r>
+              <a:rPr lang="en-US" altLang="zh-HK" b="1" dirty="0"/>
+              <a:t> SIG – The Foundation</a:t>
+            </a:r>
+            <a:r>
+              <a:rPr lang="en-US" altLang="zh-HK" dirty="0"/>
+              <a:t>: Its goal was vendor-neutral semantic conventions. It operated with deliberate, consensus-driven methodology, producing formal, machine-readable YAML schemas. </a:t>
+            </a:r>
+          </a:p>
+          <a:p>
+            <a:r>
+              <a:rPr lang="en-US" altLang="zh-HK" dirty="0"/>
+              <a:t>Neither side could succeed alone. You needed the aggressive experimentation of Open Inference to discover what data mattered, and the rigorous governance of </a:t>
+            </a:r>
+            <a:r>
+              <a:rPr lang="en-US" altLang="zh-HK" dirty="0" err="1"/>
+              <a:t>OpenTelemetry</a:t>
+            </a:r>
+            <a:r>
+              <a:rPr lang="en-US" altLang="zh-HK" dirty="0"/>
+              <a:t> to make it a global standard. </a:t>
             </a:r>
             <a:endParaRPr lang="zh-HK" altLang="en-US" dirty="0"/>
           </a:p>
@@ -2161,7 +2219,7 @@
             <a:pPr indent="0" algn="r">
               <a:buNone/>
             </a:pPr>
-            <a:fld id="{4B24A35B-39E5-4CF7-97A8-7C1CF04ED6D0}" type="slidenum">
+            <a:fld id="{03BF6639-CE35-421B-B729-02326B35E96D}" type="slidenum">
               <a:rPr lang="en-US" sz="1400" b="0" u="none" strike="noStrike" smtClean="0">
                 <a:solidFill>
                   <a:srgbClr val="000000"/>
@@ -2186,7 +2244,7 @@
     </p:spTree>
     <p:extLst>
       <p:ext uri="{BB962C8B-B14F-4D97-AF65-F5344CB8AC3E}">
-        <p14:creationId xmlns:p14="http://schemas.microsoft.com/office/powerpoint/2010/main" val="3554693777"/>
+        <p14:creationId xmlns:p14="http://schemas.microsoft.com/office/powerpoint/2010/main" val="2767274803"/>
       </p:ext>
     </p:extLst>
   </p:cSld>
@@ -2247,7 +2305,7 @@
           <a:p>
             <a:r>
               <a:rPr lang="en-US" altLang="zh-HK" dirty="0"/>
-              <a:t>Core Topic: Computational Irreducibility and the MP3 Illusion</a:t>
+              <a:t>Core Topic: Overcoming Stalled Donations via Hardened Code and AI Tooling</a:t>
             </a:r>
           </a:p>
           <a:p>
@@ -2256,41 +2314,57 @@
           <a:p>
             <a:r>
               <a:rPr lang="en-US" altLang="zh-HK" dirty="0"/>
-              <a:t>Why is predictive system operations so mathematically difficult? Consider an analogy shared in systems engineering discussions: </a:t>
-            </a:r>
-            <a:r>
-              <a:rPr lang="en-US" altLang="zh-HK" b="1" dirty="0"/>
-              <a:t>The MP3 Illusion</a:t>
-            </a:r>
-            <a:r>
-              <a:rPr lang="en-US" altLang="zh-HK" dirty="0"/>
-              <a:t>. </a:t>
-            </a:r>
-          </a:p>
-          <a:p>
-            <a:r>
-              <a:rPr lang="en-US" altLang="zh-HK" dirty="0"/>
-              <a:t>A 4-byte or 4MB audio file is technically finite ($2^n$ bits). It is mathematically bounded, yet practically infinite in its musical variations. </a:t>
-            </a:r>
-          </a:p>
-          <a:p>
-            <a:r>
-              <a:rPr lang="en-US" altLang="zh-HK" dirty="0"/>
-              <a:t>Now look at The </a:t>
-            </a:r>
-            <a:r>
-              <a:rPr lang="en-US" altLang="zh-HK" b="1" dirty="0"/>
-              <a:t>Distributed Reality </a:t>
-            </a:r>
-            <a:r>
-              <a:rPr lang="en-US" altLang="zh-HK" dirty="0"/>
-              <a:t>on the right: Every time you add a single bit or configuration switch to a program, the operational state space multiplies exponentially. Distributed systems quickly generate more potential states than there are atoms in the universe. </a:t>
-            </a:r>
-          </a:p>
-          <a:p>
-            <a:r>
-              <a:rPr lang="en-US" altLang="zh-HK" dirty="0"/>
-              <a:t>The Verdict: Predictive product approaches for distributed systems fail because the universe of heavy-tailed, exceptional runtime states is computationally irreducible. </a:t>
+              <a:t>Previous attempts to donate </a:t>
+            </a:r>
+            <a:r>
+              <a:rPr lang="en-US" altLang="zh-HK" dirty="0" err="1"/>
+              <a:t>GenAI</a:t>
+            </a:r>
+            <a:r>
+              <a:rPr lang="en-US" altLang="zh-HK" dirty="0"/>
+              <a:t> telemetry standards to the CNCF had stalled for years due to vendor-specific defaults, Python package hijacking, and complex licensing friction. </a:t>
+            </a:r>
+          </a:p>
+          <a:p>
+            <a:r>
+              <a:rPr lang="en-US" altLang="zh-HK" dirty="0"/>
+              <a:t>So, how did the Open Inference donation succeed where others failed? </a:t>
+            </a:r>
+          </a:p>
+          <a:p>
+            <a:pPr marL="171450" indent="-171450">
+              <a:buFont typeface="Arial" panose="020B0604020202020204" pitchFamily="34" charset="0"/>
+              <a:buChar char="•"/>
+            </a:pPr>
+            <a:r>
+              <a:rPr lang="en-US" altLang="zh-HK" dirty="0"/>
+              <a:t>The code was already hardened over three years of production use. </a:t>
+            </a:r>
+          </a:p>
+          <a:p>
+            <a:pPr marL="171450" indent="-171450">
+              <a:buFont typeface="Arial" panose="020B0604020202020204" pitchFamily="34" charset="0"/>
+              <a:buChar char="•"/>
+            </a:pPr>
+            <a:r>
+              <a:rPr lang="en-US" altLang="zh-HK" dirty="0"/>
+              <a:t>It was licensed cleanly under Apache 2.0. </a:t>
+            </a:r>
+          </a:p>
+          <a:p>
+            <a:pPr marL="171450" indent="-171450">
+              <a:buFont typeface="Arial" panose="020B0604020202020204" pitchFamily="34" charset="0"/>
+              <a:buChar char="•"/>
+            </a:pPr>
+            <a:r>
+              <a:rPr lang="en-US" altLang="zh-HK" dirty="0"/>
+              <a:t>Crucially, modern engineering teams leveraged AI coding agents to strip licensing headers and clean up PRs, expediting adoption in a matter of days rather than months. </a:t>
+            </a:r>
+          </a:p>
+          <a:p>
+            <a:r>
+              <a:rPr lang="en-US" altLang="zh-HK" dirty="0"/>
+              <a:t>Hardened code combined with modern automation broke through historical legal and bureaucratic bottlenecks. </a:t>
             </a:r>
             <a:endParaRPr lang="zh-HK" altLang="en-US" dirty="0"/>
           </a:p>
@@ -2314,7 +2388,7 @@
             <a:pPr indent="0" algn="r">
               <a:buNone/>
             </a:pPr>
-            <a:fld id="{4B24A35B-39E5-4CF7-97A8-7C1CF04ED6D0}" type="slidenum">
+            <a:fld id="{03BF6639-CE35-421B-B729-02326B35E96D}" type="slidenum">
               <a:rPr lang="en-US" sz="1400" b="0" u="none" strike="noStrike" smtClean="0">
                 <a:solidFill>
                   <a:srgbClr val="000000"/>
@@ -2339,7 +2413,7 @@
     </p:spTree>
     <p:extLst>
       <p:ext uri="{BB962C8B-B14F-4D97-AF65-F5344CB8AC3E}">
-        <p14:creationId xmlns:p14="http://schemas.microsoft.com/office/powerpoint/2010/main" val="4102881188"/>
+        <p14:creationId xmlns:p14="http://schemas.microsoft.com/office/powerpoint/2010/main" val="1604758126"/>
       </p:ext>
     </p:extLst>
   </p:cSld>
@@ -2400,7 +2474,7 @@
           <a:p>
             <a:r>
               <a:rPr lang="en-US" altLang="zh-HK" dirty="0"/>
-              <a:t>Core Topic: Overcoming Impossible Prediction via Hardware Overprovisioning</a:t>
+              <a:t>Core Topic: Governance Committee vs. Technical Committee Roles</a:t>
             </a:r>
           </a:p>
           <a:p>
@@ -2409,21 +2483,15 @@
           <a:p>
             <a:r>
               <a:rPr lang="en-US" altLang="zh-HK" dirty="0"/>
-              <a:t>How has systems engineering historically survived this combinatorial explosion? We don't predict runtime behavior; </a:t>
-            </a:r>
-            <a:r>
-              <a:rPr lang="en-US" altLang="zh-HK" b="1" dirty="0"/>
-              <a:t>we overprovision</a:t>
-            </a:r>
-            <a:r>
-              <a:rPr lang="en-US" altLang="zh-HK" dirty="0"/>
-              <a:t>. </a:t>
-            </a:r>
-          </a:p>
-          <a:p>
-            <a:r>
-              <a:rPr lang="en-US" altLang="zh-HK" dirty="0"/>
-              <a:t>Look at the historical examples on this slide: </a:t>
+              <a:t>To understand how code donations are received and processed within the CNCF, we must look at the </a:t>
+            </a:r>
+            <a:r>
+              <a:rPr lang="en-US" altLang="zh-HK" dirty="0" err="1"/>
+              <a:t>OpenTelemetry</a:t>
+            </a:r>
+            <a:r>
+              <a:rPr lang="en-US" altLang="zh-HK" dirty="0"/>
+              <a:t> governance structure: </a:t>
             </a:r>
           </a:p>
           <a:p>
@@ -2433,11 +2501,11 @@
             </a:pPr>
             <a:r>
               <a:rPr lang="en-US" altLang="zh-HK" b="1" dirty="0"/>
-              <a:t>Virtual Memory</a:t>
-            </a:r>
-            <a:r>
-              <a:rPr lang="en-US" altLang="zh-HK" dirty="0"/>
-              <a:t>: Early smart swap-to-disk algorithms constantly killed computers under memory pressure. The ultimate engineering solution wasn't a smarter algorithm; it was simply to overprovision physical RAM. </a:t>
+              <a:t>Governance Committee (GC) – The Administration</a:t>
+            </a:r>
+            <a:r>
+              <a:rPr lang="en-US" altLang="zh-HK" dirty="0"/>
+              <a:t>: Elected by the community. They handle administration, project strategy, and overarching roadmaps. </a:t>
             </a:r>
           </a:p>
           <a:p>
@@ -2447,21 +2515,17 @@
             </a:pPr>
             <a:r>
               <a:rPr lang="en-US" altLang="zh-HK" b="1" dirty="0"/>
-              <a:t>Network Routing</a:t>
-            </a:r>
-            <a:r>
-              <a:rPr lang="en-US" altLang="zh-HK" dirty="0"/>
-              <a:t>: Complex adaptive routing algorithms historically caused endless network oscillations and packet storms. The practical solution was to overprovision network bandwidth. </a:t>
-            </a:r>
-          </a:p>
-          <a:p>
-            <a:r>
-              <a:rPr lang="en-US" altLang="zh-HK" b="1" dirty="0"/>
-              <a:t>The Takeaway</a:t>
-            </a:r>
-            <a:r>
-              <a:rPr lang="en-US" altLang="zh-HK" dirty="0"/>
-              <a:t>: If human engineers survived operations by intentionally avoiding predictive complexity through overprovisioning, training an AI to perfectly predict operational failure states from scratch is the wrong technical pursuit. </a:t>
+              <a:t>Technical Committee (TC) – The Supreme Court</a:t>
+            </a:r>
+            <a:r>
+              <a:rPr lang="en-US" altLang="zh-HK" dirty="0"/>
+              <a:t>: Appointed by peers. They provide technical oversight, security due diligence, and strict specification compliance. </a:t>
+            </a:r>
+          </a:p>
+          <a:p>
+            <a:r>
+              <a:rPr lang="en-US" altLang="zh-HK" dirty="0"/>
+              <a:t>When a major code contribution like Open Inference enters the ecosystem, it passes through this dual-engine filter—ensuring both strategic alignment and elite technical rigor. </a:t>
             </a:r>
             <a:endParaRPr lang="zh-HK" altLang="en-US" dirty="0"/>
           </a:p>
@@ -2485,7 +2549,7 @@
             <a:pPr indent="0" algn="r">
               <a:buNone/>
             </a:pPr>
-            <a:fld id="{4B24A35B-39E5-4CF7-97A8-7C1CF04ED6D0}" type="slidenum">
+            <a:fld id="{03BF6639-CE35-421B-B729-02326B35E96D}" type="slidenum">
               <a:rPr lang="en-US" sz="1400" b="0" u="none" strike="noStrike" smtClean="0">
                 <a:solidFill>
                   <a:srgbClr val="000000"/>
@@ -2510,7 +2574,7 @@
     </p:spTree>
     <p:extLst>
       <p:ext uri="{BB962C8B-B14F-4D97-AF65-F5344CB8AC3E}">
-        <p14:creationId xmlns:p14="http://schemas.microsoft.com/office/powerpoint/2010/main" val="1042677271"/>
+        <p14:creationId xmlns:p14="http://schemas.microsoft.com/office/powerpoint/2010/main" val="704432504"/>
       </p:ext>
     </p:extLst>
   </p:cSld>
@@ -2571,7 +2635,7 @@
           <a:p>
             <a:r>
               <a:rPr lang="en-US" altLang="zh-HK" dirty="0"/>
-              <a:t>Core Topic: Diminishing Returns on Observability Data Volume and Cost</a:t>
+              <a:t>Core Topic: The Divergence to Convergence Funnel</a:t>
             </a:r>
           </a:p>
           <a:p>
@@ -2580,57 +2644,55 @@
           <a:p>
             <a:r>
               <a:rPr lang="en-US" altLang="zh-HK" dirty="0"/>
-              <a:t>When companies try to gain visibility into these complex systems, they fall into </a:t>
+              <a:t>Look at the diagram on this slide representing the </a:t>
             </a:r>
             <a:r>
               <a:rPr lang="en-US" altLang="zh-HK" b="1" dirty="0"/>
-              <a:t>The Observability Trap</a:t>
-            </a:r>
-            <a:r>
-              <a:rPr lang="en-US" altLang="zh-HK" dirty="0"/>
-              <a:t>. Look at the cost vs. reliability chart on this slide: </a:t>
-            </a:r>
-          </a:p>
-          <a:p>
-            <a:pPr marL="171450" indent="-171450">
-              <a:buFont typeface="Arial" panose="020B0604020202020204" pitchFamily="34" charset="0"/>
-              <a:buChar char="•"/>
-            </a:pPr>
+              <a:t>Divergence to Convergence Funnel</a:t>
+            </a:r>
+            <a:r>
+              <a:rPr lang="en-US" altLang="zh-HK" dirty="0"/>
+              <a:t>. </a:t>
+            </a:r>
+          </a:p>
+          <a:p>
+            <a:r>
+              <a:rPr lang="en-US" altLang="zh-HK" dirty="0"/>
+              <a:t>In the early days of </a:t>
+            </a:r>
+            <a:r>
+              <a:rPr lang="en-US" altLang="zh-HK" dirty="0" err="1"/>
+              <a:t>GenAI</a:t>
+            </a:r>
+            <a:r>
+              <a:rPr lang="en-US" altLang="zh-HK" dirty="0"/>
+              <a:t>, telemetry diverged wildly in every direction. </a:t>
+            </a:r>
             <a:r>
               <a:rPr lang="en-US" altLang="zh-HK" b="1" dirty="0"/>
-              <a:t>The Cost Curve</a:t>
-            </a:r>
-            <a:r>
-              <a:rPr lang="en-US" altLang="zh-HK" dirty="0"/>
-              <a:t>: As architectures shifted to smaller, vertically integrated microservices, telemetry data volume exploded exponentially. Companies now spend </a:t>
-            </a:r>
-            <a:r>
-              <a:rPr lang="en-US" altLang="zh-HK" b="1" dirty="0"/>
-              <a:t>5% to 20% of their total infrastructure budget </a:t>
-            </a:r>
-            <a:r>
-              <a:rPr lang="en-US" altLang="zh-HK" dirty="0"/>
-              <a:t>on observability. </a:t>
-            </a:r>
-          </a:p>
-          <a:p>
-            <a:pPr marL="171450" indent="-171450">
-              <a:buFont typeface="Arial" panose="020B0604020202020204" pitchFamily="34" charset="0"/>
-              <a:buChar char="•"/>
-            </a:pPr>
-            <a:r>
-              <a:rPr lang="en-US" altLang="zh-HK" b="1" dirty="0"/>
-              <a:t>The Reliability Curve</a:t>
-            </a:r>
-            <a:r>
-              <a:rPr lang="en-US" altLang="zh-HK" dirty="0"/>
-              <a:t>: While log and metric collection started out helpful, the marginal return on reliability has completely flatlined. </a:t>
-            </a:r>
-          </a:p>
-          <a:p>
-            <a:r>
-              <a:rPr lang="en-US" altLang="zh-HK" dirty="0"/>
-              <a:t>The cost of observability is growing much faster than the units of computing function being outputted. Enterprises are paying massive bills for raw noise, not actual reliability. </a:t>
+              <a:t>Open Inference </a:t>
+            </a:r>
+            <a:r>
+              <a:rPr lang="en-US" altLang="zh-HK" dirty="0"/>
+              <a:t>acted as the reference implementation. By analyzing the gaps across 80+ active instrumentations, the </a:t>
+            </a:r>
+            <a:r>
+              <a:rPr lang="en-US" altLang="zh-HK" dirty="0" err="1"/>
+              <a:t>OpenTelemetry</a:t>
+            </a:r>
+            <a:r>
+              <a:rPr lang="en-US" altLang="zh-HK" dirty="0"/>
+              <a:t> community translated rapid edge experimentation into a single funnel. </a:t>
+            </a:r>
+          </a:p>
+          <a:p>
+            <a:r>
+              <a:rPr lang="en-US" altLang="zh-HK" dirty="0" err="1"/>
+              <a:t>OpenTelemetry</a:t>
+            </a:r>
+            <a:r>
+              <a:rPr lang="en-US" altLang="zh-HK" dirty="0"/>
+              <a:t> takes that messy, real-world instrumentation data and distills it into formal, machine-readable YAML specifications that the entire software industry can adopt natively. Convergence turns chaos into infrastructure. </a:t>
             </a:r>
             <a:endParaRPr lang="zh-HK" altLang="en-US" dirty="0"/>
           </a:p>
@@ -2654,7 +2716,7 @@
             <a:pPr indent="0" algn="r">
               <a:buNone/>
             </a:pPr>
-            <a:fld id="{4B24A35B-39E5-4CF7-97A8-7C1CF04ED6D0}" type="slidenum">
+            <a:fld id="{03BF6639-CE35-421B-B729-02326B35E96D}" type="slidenum">
               <a:rPr lang="en-US" sz="1400" b="0" u="none" strike="noStrike" smtClean="0">
                 <a:solidFill>
                   <a:srgbClr val="000000"/>
@@ -2679,7 +2741,7 @@
     </p:spTree>
     <p:extLst>
       <p:ext uri="{BB962C8B-B14F-4D97-AF65-F5344CB8AC3E}">
-        <p14:creationId xmlns:p14="http://schemas.microsoft.com/office/powerpoint/2010/main" val="2844530426"/>
+        <p14:creationId xmlns:p14="http://schemas.microsoft.com/office/powerpoint/2010/main" val="3926033798"/>
       </p:ext>
     </p:extLst>
   </p:cSld>
@@ -2740,7 +2802,7 @@
           <a:p>
             <a:r>
               <a:rPr lang="en-US" altLang="zh-HK" dirty="0"/>
-              <a:t>Core Topic: Why Reactive Alerting and Backward Log-Backtracking Fail</a:t>
+              <a:t>Core Topic: The Four-Step Evolution from Experimentation to Native Adoption</a:t>
             </a:r>
           </a:p>
           <a:p>
@@ -2749,57 +2811,93 @@
           <a:p>
             <a:r>
               <a:rPr lang="en-US" altLang="zh-HK" dirty="0"/>
-              <a:t>When teams attempt to apply AI to Site Reliability (AISR), they often build flawed reactive systems. Look at the diagram illustrating </a:t>
-            </a:r>
+              <a:t>The standardization of </a:t>
+            </a:r>
+            <a:r>
+              <a:rPr lang="en-US" altLang="zh-HK" dirty="0" err="1"/>
+              <a:t>GenAI</a:t>
+            </a:r>
+            <a:r>
+              <a:rPr lang="en-US" altLang="zh-HK" dirty="0"/>
+              <a:t> telemetry follows a precise four-step lifecycle: </a:t>
+            </a:r>
+          </a:p>
+          <a:p>
+            <a:pPr marL="228600" indent="-228600">
+              <a:buFont typeface="+mj-lt"/>
+              <a:buAutoNum type="arabicPeriod"/>
+            </a:pPr>
             <a:r>
               <a:rPr lang="en-US" altLang="zh-HK" b="1" dirty="0"/>
-              <a:t>Legacy AISR</a:t>
+              <a:t>Experimentation</a:t>
+            </a:r>
+            <a:r>
+              <a:rPr lang="en-US" altLang="zh-HK" dirty="0"/>
+              <a:t>: Open Inference tests new model APIs—such as computer-use or multi-step reasoning—on the bleeding edge. </a:t>
+            </a:r>
+          </a:p>
+          <a:p>
+            <a:pPr marL="228600" indent="-228600">
+              <a:buFont typeface="+mj-lt"/>
+              <a:buAutoNum type="arabicPeriod"/>
+            </a:pPr>
+            <a:r>
+              <a:rPr lang="en-US" altLang="zh-HK" b="1" dirty="0"/>
+              <a:t>Reference Code</a:t>
+            </a:r>
+            <a:r>
+              <a:rPr lang="en-US" altLang="zh-HK" dirty="0"/>
+              <a:t>: Over 80+ raw instrumentations map out the required observability surface across languages. </a:t>
+            </a:r>
+          </a:p>
+          <a:p>
+            <a:pPr marL="228600" indent="-228600">
+              <a:buFont typeface="+mj-lt"/>
+              <a:buAutoNum type="arabicPeriod"/>
+            </a:pPr>
+            <a:r>
+              <a:rPr lang="en-US" altLang="zh-HK" b="1" dirty="0"/>
+              <a:t>Semantic Convention</a:t>
             </a:r>
             <a:r>
               <a:rPr lang="en-US" altLang="zh-HK" dirty="0"/>
               <a:t>: </a:t>
             </a:r>
-          </a:p>
-          <a:p>
-            <a:pPr marL="171450" indent="-171450">
-              <a:buFont typeface="Arial" panose="020B0604020202020204" pitchFamily="34" charset="0"/>
-              <a:buChar char="•"/>
-            </a:pPr>
-            <a:r>
-              <a:rPr lang="en-US" altLang="zh-HK" dirty="0"/>
-              <a:t>An outage alert fires—acting as a </a:t>
-            </a:r>
+            <a:r>
+              <a:rPr lang="en-US" altLang="zh-HK" dirty="0" err="1"/>
+              <a:t>OpenTelemetry</a:t>
+            </a:r>
+            <a:r>
+              <a:rPr lang="en-US" altLang="zh-HK" dirty="0"/>
+              <a:t> formalizes these patterns into vendor-neutral YAML schemas. </a:t>
+            </a:r>
+          </a:p>
+          <a:p>
+            <a:pPr marL="228600" indent="-228600">
+              <a:buFont typeface="+mj-lt"/>
+              <a:buAutoNum type="arabicPeriod"/>
+            </a:pPr>
             <a:r>
               <a:rPr lang="en-US" altLang="zh-HK" b="1" dirty="0"/>
-              <a:t>lagging indicator</a:t>
-            </a:r>
-            <a:r>
-              <a:rPr lang="en-US" altLang="zh-HK" dirty="0"/>
-              <a:t>. </a:t>
-            </a:r>
-          </a:p>
-          <a:p>
-            <a:pPr marL="171450" indent="-171450">
-              <a:buFont typeface="Arial" panose="020B0604020202020204" pitchFamily="34" charset="0"/>
-              <a:buChar char="•"/>
-            </a:pPr>
-            <a:r>
-              <a:rPr lang="en-US" altLang="zh-HK" dirty="0"/>
-              <a:t>The AI node is then forced to backtrack backward through petabytes of infinite raw logs and noise to find the root cause. </a:t>
-            </a:r>
-          </a:p>
-          <a:p>
-            <a:pPr marL="0" indent="0">
-              <a:buFont typeface="Arial" panose="020B0604020202020204" pitchFamily="34" charset="0"/>
-              <a:buNone/>
-            </a:pPr>
-            <a:r>
-              <a:rPr lang="en-US" altLang="zh-HK" b="1" dirty="0"/>
-              <a:t>Why It Fails</a:t>
-            </a:r>
-            <a:r>
-              <a:rPr lang="en-US" altLang="zh-HK" dirty="0"/>
-              <a:t>: Backtracking through infinite potential causal chains without a bounded starting point is computationally impossible in heavy-tailed operational environments. Waiting for a metric spike and telling an AI to search through a haystack of logs is a broken paradigm. </a:t>
+              <a:t>Native Adoption</a:t>
+            </a:r>
+            <a:r>
+              <a:rPr lang="en-US" altLang="zh-HK" dirty="0"/>
+              <a:t>: Foundation model providers and framework builders begin emitting </a:t>
+            </a:r>
+            <a:r>
+              <a:rPr lang="en-US" altLang="zh-HK" dirty="0" err="1"/>
+              <a:t>OpenTelemetry</a:t>
+            </a:r>
+            <a:r>
+              <a:rPr lang="en-US" altLang="zh-HK" dirty="0"/>
+              <a:t> natively out of the box. </a:t>
+            </a:r>
+          </a:p>
+          <a:p>
+            <a:r>
+              <a:rPr lang="en-US" altLang="zh-HK" dirty="0"/>
+              <a:t>This loop ensures standards are born from real-world usage, not theoretical committee meetings. </a:t>
             </a:r>
             <a:endParaRPr lang="zh-HK" altLang="en-US" dirty="0"/>
           </a:p>
@@ -2823,7 +2921,7 @@
             <a:pPr indent="0" algn="r">
               <a:buNone/>
             </a:pPr>
-            <a:fld id="{4B24A35B-39E5-4CF7-97A8-7C1CF04ED6D0}" type="slidenum">
+            <a:fld id="{03BF6639-CE35-421B-B729-02326B35E96D}" type="slidenum">
               <a:rPr lang="en-US" sz="1400" b="0" u="none" strike="noStrike" smtClean="0">
                 <a:solidFill>
                   <a:srgbClr val="000000"/>
@@ -2848,7 +2946,7 @@
     </p:spTree>
     <p:extLst>
       <p:ext uri="{BB962C8B-B14F-4D97-AF65-F5344CB8AC3E}">
-        <p14:creationId xmlns:p14="http://schemas.microsoft.com/office/powerpoint/2010/main" val="3206694195"/>
+        <p14:creationId xmlns:p14="http://schemas.microsoft.com/office/powerpoint/2010/main" val="1095926376"/>
       </p:ext>
     </p:extLst>
   </p:cSld>
@@ -2878,7 +2976,7 @@
     </p:spTree>
     <p:extLst>
       <p:ext uri="{BB962C8B-B14F-4D97-AF65-F5344CB8AC3E}">
-        <p14:creationId xmlns:p14="http://schemas.microsoft.com/office/powerpoint/2010/main" val="3488877467"/>
+        <p14:creationId xmlns:p14="http://schemas.microsoft.com/office/powerpoint/2010/main" val="1495512122"/>
       </p:ext>
     </p:extLst>
   </p:cSld>
@@ -3224,7 +3322,7 @@
           <p:cNvPr id="3" name="圖片 2">
             <a:extLst>
               <a:ext uri="{FF2B5EF4-FFF2-40B4-BE49-F238E27FC236}">
-                <a16:creationId xmlns:a16="http://schemas.microsoft.com/office/drawing/2014/main" id="{43E742D0-2A07-E0F1-913A-14AAAE388A6C}"/>
+                <a16:creationId xmlns:a16="http://schemas.microsoft.com/office/drawing/2014/main" id="{19EBAC38-152C-2409-18F2-3127F69C1D5C}"/>
               </a:ext>
             </a:extLst>
           </p:cNvPr>
@@ -3279,7 +3377,7 @@
           <p:cNvPr id="3" name="圖片 2">
             <a:extLst>
               <a:ext uri="{FF2B5EF4-FFF2-40B4-BE49-F238E27FC236}">
-                <a16:creationId xmlns:a16="http://schemas.microsoft.com/office/drawing/2014/main" id="{9107DD2E-7C07-92C2-FBD5-A3261CAD44B4}"/>
+                <a16:creationId xmlns:a16="http://schemas.microsoft.com/office/drawing/2014/main" id="{2E77E2CF-FD05-7CD3-32E0-AC1A1955C473}"/>
               </a:ext>
             </a:extLst>
           </p:cNvPr>
@@ -3334,7 +3432,7 @@
           <p:cNvPr id="3" name="圖片 2">
             <a:extLst>
               <a:ext uri="{FF2B5EF4-FFF2-40B4-BE49-F238E27FC236}">
-                <a16:creationId xmlns:a16="http://schemas.microsoft.com/office/drawing/2014/main" id="{2CE814CE-4A5A-8099-2BEE-320FEF68471B}"/>
+                <a16:creationId xmlns:a16="http://schemas.microsoft.com/office/drawing/2014/main" id="{3D492363-8F1D-2EB9-16D3-68F090054554}"/>
               </a:ext>
             </a:extLst>
           </p:cNvPr>
@@ -3389,62 +3487,7 @@
           <p:cNvPr id="3" name="圖片 2">
             <a:extLst>
               <a:ext uri="{FF2B5EF4-FFF2-40B4-BE49-F238E27FC236}">
-                <a16:creationId xmlns:a16="http://schemas.microsoft.com/office/drawing/2014/main" id="{84CD2C7F-C4BD-24B3-5B23-D5143CCC98BB}"/>
-              </a:ext>
-            </a:extLst>
-          </p:cNvPr>
-          <p:cNvPicPr>
-            <a:picLocks noChangeAspect="1"/>
-          </p:cNvPicPr>
-          <p:nvPr/>
-        </p:nvPicPr>
-        <p:blipFill>
-          <a:blip r:embed="rId3"/>
-          <a:stretch>
-            <a:fillRect/>
-          </a:stretch>
-        </p:blipFill>
-        <p:spPr>
-          <a:xfrm>
-            <a:off x="0" y="38985"/>
-            <a:ext cx="16256000" cy="9066029"/>
-          </a:xfrm>
-          <a:prstGeom prst="rect">
-            <a:avLst/>
-          </a:prstGeom>
-        </p:spPr>
-      </p:pic>
-    </p:spTree>
-  </p:cSld>
-  <p:clrMapOvr>
-    <a:masterClrMapping/>
-  </p:clrMapOvr>
-</p:sld>
-</file>
-
-<file path=ppt/slides/slide13.xml><?xml version="1.0" encoding="utf-8"?>
-<p:sld xmlns:a="http://schemas.openxmlformats.org/drawingml/2006/main" xmlns:r="http://schemas.openxmlformats.org/officeDocument/2006/relationships" xmlns:p="http://schemas.openxmlformats.org/presentationml/2006/main">
-  <p:cSld>
-    <p:spTree>
-      <p:nvGrpSpPr>
-        <p:cNvPr id="1" name=""/>
-        <p:cNvGrpSpPr/>
-        <p:nvPr/>
-      </p:nvGrpSpPr>
-      <p:grpSpPr>
-        <a:xfrm>
-          <a:off x="0" y="0"/>
-          <a:ext cx="0" cy="0"/>
-          <a:chOff x="0" y="0"/>
-          <a:chExt cx="0" cy="0"/>
-        </a:xfrm>
-      </p:grpSpPr>
-      <p:pic>
-        <p:nvPicPr>
-          <p:cNvPr id="3" name="圖片 2">
-            <a:extLst>
-              <a:ext uri="{FF2B5EF4-FFF2-40B4-BE49-F238E27FC236}">
-                <a16:creationId xmlns:a16="http://schemas.microsoft.com/office/drawing/2014/main" id="{933F6382-EC7F-3F3B-C359-0DFE6CFC0089}"/>
+                <a16:creationId xmlns:a16="http://schemas.microsoft.com/office/drawing/2014/main" id="{AC9D9C71-A62C-EA63-6856-444F856F1454}"/>
               </a:ext>
             </a:extLst>
           </p:cNvPr>
@@ -3499,7 +3542,7 @@
           <p:cNvPr id="3" name="圖片 2">
             <a:extLst>
               <a:ext uri="{FF2B5EF4-FFF2-40B4-BE49-F238E27FC236}">
-                <a16:creationId xmlns:a16="http://schemas.microsoft.com/office/drawing/2014/main" id="{89461997-5A64-BE85-3B0B-06D83DBC6700}"/>
+                <a16:creationId xmlns:a16="http://schemas.microsoft.com/office/drawing/2014/main" id="{C0C3E678-BED8-48D3-C0C4-B7B4A498796B}"/>
               </a:ext>
             </a:extLst>
           </p:cNvPr>
@@ -3554,7 +3597,7 @@
           <p:cNvPr id="3" name="圖片 2">
             <a:extLst>
               <a:ext uri="{FF2B5EF4-FFF2-40B4-BE49-F238E27FC236}">
-                <a16:creationId xmlns:a16="http://schemas.microsoft.com/office/drawing/2014/main" id="{BD5188D0-C8F2-80AA-01E9-24F3EFDAAD06}"/>
+                <a16:creationId xmlns:a16="http://schemas.microsoft.com/office/drawing/2014/main" id="{861A24D7-C89D-8F6E-90EE-28BB3B4A630E}"/>
               </a:ext>
             </a:extLst>
           </p:cNvPr>
@@ -3609,7 +3652,7 @@
           <p:cNvPr id="3" name="圖片 2">
             <a:extLst>
               <a:ext uri="{FF2B5EF4-FFF2-40B4-BE49-F238E27FC236}">
-                <a16:creationId xmlns:a16="http://schemas.microsoft.com/office/drawing/2014/main" id="{312F395D-D3CC-3176-9953-D811FADF9A5D}"/>
+                <a16:creationId xmlns:a16="http://schemas.microsoft.com/office/drawing/2014/main" id="{CC22B1FA-6F06-AA17-4BE3-A4A406C29D0D}"/>
               </a:ext>
             </a:extLst>
           </p:cNvPr>
@@ -3664,7 +3707,7 @@
           <p:cNvPr id="3" name="圖片 2">
             <a:extLst>
               <a:ext uri="{FF2B5EF4-FFF2-40B4-BE49-F238E27FC236}">
-                <a16:creationId xmlns:a16="http://schemas.microsoft.com/office/drawing/2014/main" id="{1DD0C1F0-F42F-B78E-E9E9-98A801C8654B}"/>
+                <a16:creationId xmlns:a16="http://schemas.microsoft.com/office/drawing/2014/main" id="{5EBC059A-265E-6360-3F96-8623994CAD21}"/>
               </a:ext>
             </a:extLst>
           </p:cNvPr>
@@ -3719,7 +3762,7 @@
           <p:cNvPr id="3" name="圖片 2">
             <a:extLst>
               <a:ext uri="{FF2B5EF4-FFF2-40B4-BE49-F238E27FC236}">
-                <a16:creationId xmlns:a16="http://schemas.microsoft.com/office/drawing/2014/main" id="{05F466B6-5D60-402E-100B-373069CB50E6}"/>
+                <a16:creationId xmlns:a16="http://schemas.microsoft.com/office/drawing/2014/main" id="{2132977F-25DA-EC23-9833-E55C6B638E9E}"/>
               </a:ext>
             </a:extLst>
           </p:cNvPr>
@@ -3774,7 +3817,7 @@
           <p:cNvPr id="3" name="圖片 2">
             <a:extLst>
               <a:ext uri="{FF2B5EF4-FFF2-40B4-BE49-F238E27FC236}">
-                <a16:creationId xmlns:a16="http://schemas.microsoft.com/office/drawing/2014/main" id="{77D52155-7A1B-8591-0D4F-727629799F27}"/>
+                <a16:creationId xmlns:a16="http://schemas.microsoft.com/office/drawing/2014/main" id="{E9415917-9DC0-D561-C33F-88EB4ABE34C3}"/>
               </a:ext>
             </a:extLst>
           </p:cNvPr>
@@ -3829,7 +3872,7 @@
           <p:cNvPr id="3" name="圖片 2">
             <a:extLst>
               <a:ext uri="{FF2B5EF4-FFF2-40B4-BE49-F238E27FC236}">
-                <a16:creationId xmlns:a16="http://schemas.microsoft.com/office/drawing/2014/main" id="{71230AEC-B024-E018-D40C-8C6C64B11126}"/>
+                <a16:creationId xmlns:a16="http://schemas.microsoft.com/office/drawing/2014/main" id="{4857B260-45DD-F271-89A0-666A5D9E6F1F}"/>
               </a:ext>
             </a:extLst>
           </p:cNvPr>
@@ -3884,7 +3927,7 @@
           <p:cNvPr id="3" name="圖片 2">
             <a:extLst>
               <a:ext uri="{FF2B5EF4-FFF2-40B4-BE49-F238E27FC236}">
-                <a16:creationId xmlns:a16="http://schemas.microsoft.com/office/drawing/2014/main" id="{2DF07DDA-A3EC-2E4E-FBF3-BBCBD2BAB329}"/>
+                <a16:creationId xmlns:a16="http://schemas.microsoft.com/office/drawing/2014/main" id="{91AFA414-E8B8-31B3-FB80-89253606D07B}"/>
               </a:ext>
             </a:extLst>
           </p:cNvPr>
